--- a/results/traits_fg/glmmtmb_stable_fg_interpretation/Fig4_FG_trait_profiles_Zscore_bar.pptx
+++ b/results/traits_fg/glmmtmb_stable_fg_interpretation/Fig4_FG_trait_profiles_Zscore_bar.pptx
@@ -2216,16 +2216,16 @@
       </p:grpSpPr>
       <p:grpSp xmlns:pic="http://schemas.openxmlformats.org/drawingml/2006/picture">
         <p:nvGrpSpPr>
-          <p:cNvPr id="2" name=""/>
+          <p:cNvPr id="2" name="Content Placeholder 2"/>
           <p:cNvGrpSpPr/>
           <p:nvPr/>
         </p:nvGrpSpPr>
         <p:grpSpPr>
-          <a:xfrm rot="0">
-            <a:off x="0" y="0"/>
-            <a:ext cx="9144000" cy="6858000"/>
-            <a:chOff x="0" y="0"/>
-            <a:chExt cx="9144000" cy="6858000"/>
+          <a:xfrm>
+            <a:off x="457200" y="1600200"/>
+            <a:ext cx="8229600" cy="4525963"/>
+            <a:chOff x="457200" y="1600200"/>
+            <a:chExt cx="8229600" cy="4525963"/>
           </a:xfrm>
         </p:grpSpPr>
         <p:sp>
@@ -2236,8 +2236,8 @@
           </p:nvSpPr>
           <p:spPr>
             <a:xfrm>
-              <a:off x="0" y="0"/>
-              <a:ext cx="9144000" cy="6858000"/>
+              <a:off x="457200" y="1600200"/>
+              <a:ext cx="8229600" cy="4525962"/>
             </a:xfrm>
             <a:prstGeom prst="rect">
               <a:avLst/>
@@ -2271,8 +2271,8 @@
           </p:nvSpPr>
           <p:spPr>
             <a:xfrm>
-              <a:off x="0" y="0"/>
-              <a:ext cx="9143999" cy="6858000"/>
+              <a:off x="457200" y="1600200"/>
+              <a:ext cx="8229600" cy="4525962"/>
             </a:xfrm>
             <a:prstGeom prst="rect">
               <a:avLst/>
@@ -2306,8 +2306,8 @@
           </p:nvSpPr>
           <p:spPr>
             <a:xfrm>
-              <a:off x="580318" y="568962"/>
-              <a:ext cx="7593903" cy="6008824"/>
+              <a:off x="1192512" y="2238751"/>
+              <a:ext cx="4313183" cy="3461694"/>
             </a:xfrm>
             <a:prstGeom prst="rect">
               <a:avLst/>
@@ -2332,8 +2332,8 @@
           </p:nvSpPr>
           <p:spPr>
             <a:xfrm>
-              <a:off x="1093609" y="3586498"/>
-              <a:ext cx="239067" cy="1007512"/>
+              <a:off x="1334288" y="3977159"/>
+              <a:ext cx="135785" cy="580429"/>
             </a:xfrm>
             <a:prstGeom prst="rect">
               <a:avLst/>
@@ -2358,8 +2358,8 @@
           </p:nvSpPr>
           <p:spPr>
             <a:xfrm>
-              <a:off x="2148318" y="4364033"/>
-              <a:ext cx="239067" cy="229977"/>
+              <a:off x="1933341" y="4425098"/>
+              <a:ext cx="135785" cy="132490"/>
             </a:xfrm>
             <a:prstGeom prst="rect">
               <a:avLst/>
@@ -2384,8 +2384,8 @@
           </p:nvSpPr>
           <p:spPr>
             <a:xfrm>
-              <a:off x="3203027" y="3804418"/>
-              <a:ext cx="239067" cy="789592"/>
+              <a:off x="2532394" y="4102703"/>
+              <a:ext cx="135785" cy="454885"/>
             </a:xfrm>
             <a:prstGeom prst="rect">
               <a:avLst/>
@@ -2410,8 +2410,8 @@
           </p:nvSpPr>
           <p:spPr>
             <a:xfrm>
-              <a:off x="4257736" y="2583259"/>
-              <a:ext cx="239067" cy="2010751"/>
+              <a:off x="3131447" y="3399191"/>
+              <a:ext cx="135785" cy="1158397"/>
             </a:xfrm>
             <a:prstGeom prst="rect">
               <a:avLst/>
@@ -2436,8 +2436,8 @@
           </p:nvSpPr>
           <p:spPr>
             <a:xfrm>
-              <a:off x="5312445" y="842090"/>
-              <a:ext cx="239067" cy="3751920"/>
+              <a:off x="3730501" y="2396101"/>
+              <a:ext cx="135785" cy="2161487"/>
             </a:xfrm>
             <a:prstGeom prst="rect">
               <a:avLst/>
@@ -2462,8 +2462,8 @@
           </p:nvSpPr>
           <p:spPr>
             <a:xfrm>
-              <a:off x="6367154" y="4505704"/>
-              <a:ext cx="239067" cy="88306"/>
+              <a:off x="4329554" y="4506715"/>
+              <a:ext cx="135785" cy="50873"/>
             </a:xfrm>
             <a:prstGeom prst="rect">
               <a:avLst/>
@@ -2488,8 +2488,8 @@
           </p:nvSpPr>
           <p:spPr>
             <a:xfrm>
-              <a:off x="7421863" y="3122107"/>
-              <a:ext cx="239067" cy="1471903"/>
+              <a:off x="4928607" y="3709622"/>
+              <a:ext cx="135785" cy="847966"/>
             </a:xfrm>
             <a:prstGeom prst="rect">
               <a:avLst/>
@@ -2514,8 +2514,8 @@
           </p:nvSpPr>
           <p:spPr>
             <a:xfrm>
-              <a:off x="829932" y="3199228"/>
-              <a:ext cx="239067" cy="1394782"/>
+              <a:off x="1484051" y="3754052"/>
+              <a:ext cx="135785" cy="803536"/>
             </a:xfrm>
             <a:prstGeom prst="rect">
               <a:avLst/>
@@ -2540,8 +2540,8 @@
           </p:nvSpPr>
           <p:spPr>
             <a:xfrm>
-              <a:off x="1884641" y="2912177"/>
-              <a:ext cx="239067" cy="1681833"/>
+              <a:off x="2083104" y="3588681"/>
+              <a:ext cx="135785" cy="968907"/>
             </a:xfrm>
             <a:prstGeom prst="rect">
               <a:avLst/>
@@ -2566,8 +2566,8 @@
           </p:nvSpPr>
           <p:spPr>
             <a:xfrm>
-              <a:off x="2939350" y="2202422"/>
-              <a:ext cx="239067" cy="2391588"/>
+              <a:off x="2682157" y="3179790"/>
+              <a:ext cx="135785" cy="1377798"/>
             </a:xfrm>
             <a:prstGeom prst="rect">
               <a:avLst/>
@@ -2592,8 +2592,8 @@
           </p:nvSpPr>
           <p:spPr>
             <a:xfrm>
-              <a:off x="3994059" y="4225355"/>
-              <a:ext cx="239067" cy="368655"/>
+              <a:off x="3281211" y="4345205"/>
+              <a:ext cx="135785" cy="212383"/>
             </a:xfrm>
             <a:prstGeom prst="rect">
               <a:avLst/>
@@ -2618,8 +2618,8 @@
           </p:nvSpPr>
           <p:spPr>
             <a:xfrm>
-              <a:off x="5048768" y="4594011"/>
-              <a:ext cx="239067" cy="1019539"/>
+              <a:off x="3880264" y="4557588"/>
+              <a:ext cx="135785" cy="587358"/>
             </a:xfrm>
             <a:prstGeom prst="rect">
               <a:avLst/>
@@ -2644,8 +2644,8 @@
           </p:nvSpPr>
           <p:spPr>
             <a:xfrm>
-              <a:off x="6103477" y="2911702"/>
-              <a:ext cx="239067" cy="1682308"/>
+              <a:off x="4479317" y="3588408"/>
+              <a:ext cx="135785" cy="969180"/>
             </a:xfrm>
             <a:prstGeom prst="rect">
               <a:avLst/>
@@ -2670,8 +2670,8 @@
           </p:nvSpPr>
           <p:spPr>
             <a:xfrm>
-              <a:off x="7158185" y="4594011"/>
-              <a:ext cx="239067" cy="376187"/>
+              <a:off x="5078371" y="4557588"/>
+              <a:ext cx="135785" cy="216722"/>
             </a:xfrm>
             <a:prstGeom prst="rect">
               <a:avLst/>
@@ -2696,8 +2696,8 @@
           </p:nvSpPr>
           <p:spPr>
             <a:xfrm>
-              <a:off x="1357287" y="4594011"/>
-              <a:ext cx="239067" cy="1222741"/>
+              <a:off x="1633814" y="4557588"/>
+              <a:ext cx="135785" cy="704423"/>
             </a:xfrm>
             <a:prstGeom prst="rect">
               <a:avLst/>
@@ -2722,8 +2722,8 @@
           </p:nvSpPr>
           <p:spPr>
             <a:xfrm>
-              <a:off x="2411996" y="4594011"/>
-              <a:ext cx="239067" cy="1069128"/>
+              <a:off x="2232868" y="4557588"/>
+              <a:ext cx="135785" cy="615926"/>
             </a:xfrm>
             <a:prstGeom prst="rect">
               <a:avLst/>
@@ -2748,8 +2748,8 @@
           </p:nvSpPr>
           <p:spPr>
             <a:xfrm>
-              <a:off x="3466704" y="4594011"/>
-              <a:ext cx="239067" cy="1710647"/>
+              <a:off x="2831921" y="4557588"/>
+              <a:ext cx="135785" cy="985507"/>
             </a:xfrm>
             <a:prstGeom prst="rect">
               <a:avLst/>
@@ -2774,8 +2774,8 @@
           </p:nvSpPr>
           <p:spPr>
             <a:xfrm>
-              <a:off x="4521413" y="4594011"/>
-              <a:ext cx="239067" cy="1040985"/>
+              <a:off x="3430974" y="4557588"/>
+              <a:ext cx="135785" cy="599713"/>
             </a:xfrm>
             <a:prstGeom prst="rect">
               <a:avLst/>
@@ -2800,8 +2800,8 @@
           </p:nvSpPr>
           <p:spPr>
             <a:xfrm>
-              <a:off x="5576122" y="4594011"/>
-              <a:ext cx="239067" cy="953079"/>
+              <a:off x="4030027" y="4557588"/>
+              <a:ext cx="135785" cy="549070"/>
             </a:xfrm>
             <a:prstGeom prst="rect">
               <a:avLst/>
@@ -2826,8 +2826,8 @@
           </p:nvSpPr>
           <p:spPr>
             <a:xfrm>
-              <a:off x="6630831" y="4594011"/>
-              <a:ext cx="239067" cy="1011109"/>
+              <a:off x="4629081" y="4557588"/>
+              <a:ext cx="135785" cy="582501"/>
             </a:xfrm>
             <a:prstGeom prst="rect">
               <a:avLst/>
@@ -2852,8 +2852,8 @@
           </p:nvSpPr>
           <p:spPr>
             <a:xfrm>
-              <a:off x="7685540" y="4594011"/>
-              <a:ext cx="239067" cy="387680"/>
+              <a:off x="5228134" y="4557588"/>
+              <a:ext cx="135785" cy="223343"/>
             </a:xfrm>
             <a:prstGeom prst="rect">
               <a:avLst/>
@@ -2878,21 +2878,21 @@
           </p:nvSpPr>
           <p:spPr>
             <a:xfrm>
-              <a:off x="580318" y="4594011"/>
-              <a:ext cx="7593903" cy="0"/>
+              <a:off x="1192512" y="4557588"/>
+              <a:ext cx="4313183" cy="0"/>
             </a:xfrm>
             <a:custGeom>
               <a:avLst/>
               <a:pathLst>
-                <a:path w="7593903" h="0">
+                <a:path w="4313183" h="0">
                   <a:moveTo>
                     <a:pt x="0" y="0"/>
                   </a:moveTo>
                   <a:lnTo>
-                    <a:pt x="7593903" y="0"/>
+                    <a:pt x="4313183" y="0"/>
                   </a:lnTo>
                   <a:lnTo>
-                    <a:pt x="7593903" y="0"/>
+                    <a:pt x="4313183" y="0"/>
                   </a:lnTo>
                 </a:path>
               </a:pathLst>
@@ -2921,15 +2921,15 @@
           </p:nvSpPr>
           <p:spPr>
             <a:xfrm>
-              <a:off x="580318" y="568962"/>
-              <a:ext cx="0" cy="6008824"/>
+              <a:off x="1192512" y="2238751"/>
+              <a:ext cx="0" cy="3461694"/>
             </a:xfrm>
             <a:custGeom>
               <a:avLst/>
               <a:pathLst>
-                <a:path w="0" h="6008824">
+                <a:path w="0" h="3461694">
                   <a:moveTo>
-                    <a:pt x="0" y="6008824"/>
+                    <a:pt x="0" y="3461694"/>
                   </a:moveTo>
                   <a:lnTo>
                     <a:pt x="0" y="0"/>
@@ -2961,7 +2961,7 @@
           </p:nvSpPr>
           <p:spPr>
             <a:xfrm>
-              <a:off x="278707" y="5916075"/>
+              <a:off x="890901" y="5299098"/>
               <a:ext cx="227592" cy="94868"/>
             </a:xfrm>
             <a:prstGeom prst="rect">
@@ -3007,7 +3007,7 @@
           </p:nvSpPr>
           <p:spPr>
             <a:xfrm>
-              <a:off x="322691" y="4546512"/>
+              <a:off x="934885" y="4510090"/>
               <a:ext cx="183609" cy="94868"/>
             </a:xfrm>
             <a:prstGeom prst="rect">
@@ -3053,7 +3053,7 @@
           </p:nvSpPr>
           <p:spPr>
             <a:xfrm>
-              <a:off x="322691" y="3176949"/>
+              <a:off x="934885" y="3721082"/>
               <a:ext cx="183609" cy="94868"/>
             </a:xfrm>
             <a:prstGeom prst="rect">
@@ -3099,7 +3099,7 @@
           </p:nvSpPr>
           <p:spPr>
             <a:xfrm>
-              <a:off x="322691" y="1807385"/>
+              <a:off x="934885" y="2932074"/>
               <a:ext cx="183609" cy="94868"/>
             </a:xfrm>
             <a:prstGeom prst="rect">
@@ -3145,7 +3145,7 @@
           </p:nvSpPr>
           <p:spPr>
             <a:xfrm>
-              <a:off x="539197" y="5963574"/>
+              <a:off x="1151391" y="5346596"/>
               <a:ext cx="41120" cy="0"/>
             </a:xfrm>
             <a:custGeom>
@@ -3185,7 +3185,7 @@
           </p:nvSpPr>
           <p:spPr>
             <a:xfrm>
-              <a:off x="539197" y="4594011"/>
+              <a:off x="1151391" y="4557588"/>
               <a:ext cx="41120" cy="0"/>
             </a:xfrm>
             <a:custGeom>
@@ -3225,7 +3225,7 @@
           </p:nvSpPr>
           <p:spPr>
             <a:xfrm>
-              <a:off x="539197" y="3224447"/>
+              <a:off x="1151391" y="3768581"/>
               <a:ext cx="41120" cy="0"/>
             </a:xfrm>
             <a:custGeom>
@@ -3265,7 +3265,7 @@
           </p:nvSpPr>
           <p:spPr>
             <a:xfrm>
-              <a:off x="539197" y="1854884"/>
+              <a:off x="1151391" y="2979573"/>
               <a:ext cx="41120" cy="0"/>
             </a:xfrm>
             <a:custGeom>
@@ -3305,18 +3305,18 @@
           </p:nvSpPr>
           <p:spPr>
             <a:xfrm>
-              <a:off x="580318" y="6577786"/>
-              <a:ext cx="7593903" cy="0"/>
+              <a:off x="1192512" y="5700445"/>
+              <a:ext cx="4313183" cy="0"/>
             </a:xfrm>
             <a:custGeom>
               <a:avLst/>
               <a:pathLst>
-                <a:path w="7593903" h="0">
+                <a:path w="4313183" h="0">
                   <a:moveTo>
                     <a:pt x="0" y="0"/>
                   </a:moveTo>
                   <a:lnTo>
-                    <a:pt x="7593903" y="0"/>
+                    <a:pt x="4313183" y="0"/>
                   </a:lnTo>
                 </a:path>
               </a:pathLst>
@@ -3345,7 +3345,7 @@
           </p:nvSpPr>
           <p:spPr>
             <a:xfrm>
-              <a:off x="1213143" y="6577786"/>
+              <a:off x="1551944" y="5700445"/>
               <a:ext cx="0" cy="41120"/>
             </a:xfrm>
             <a:custGeom>
@@ -3385,7 +3385,7 @@
           </p:nvSpPr>
           <p:spPr>
             <a:xfrm>
-              <a:off x="2267852" y="6577786"/>
+              <a:off x="2150997" y="5700445"/>
               <a:ext cx="0" cy="41120"/>
             </a:xfrm>
             <a:custGeom>
@@ -3425,7 +3425,7 @@
           </p:nvSpPr>
           <p:spPr>
             <a:xfrm>
-              <a:off x="3322561" y="6577786"/>
+              <a:off x="2750050" y="5700445"/>
               <a:ext cx="0" cy="41120"/>
             </a:xfrm>
             <a:custGeom>
@@ -3465,7 +3465,7 @@
           </p:nvSpPr>
           <p:spPr>
             <a:xfrm>
-              <a:off x="4377270" y="6577786"/>
+              <a:off x="3349104" y="5700445"/>
               <a:ext cx="0" cy="41120"/>
             </a:xfrm>
             <a:custGeom>
@@ -3505,7 +3505,7 @@
           </p:nvSpPr>
           <p:spPr>
             <a:xfrm>
-              <a:off x="5431979" y="6577786"/>
+              <a:off x="3948157" y="5700445"/>
               <a:ext cx="0" cy="41120"/>
             </a:xfrm>
             <a:custGeom>
@@ -3545,7 +3545,7 @@
           </p:nvSpPr>
           <p:spPr>
             <a:xfrm>
-              <a:off x="6486687" y="6577786"/>
+              <a:off x="4547210" y="5700445"/>
               <a:ext cx="0" cy="41120"/>
             </a:xfrm>
             <a:custGeom>
@@ -3585,7 +3585,7 @@
           </p:nvSpPr>
           <p:spPr>
             <a:xfrm>
-              <a:off x="7541396" y="6577786"/>
+              <a:off x="5146263" y="5700445"/>
               <a:ext cx="0" cy="41120"/>
             </a:xfrm>
             <a:custGeom>
@@ -3625,7 +3625,7 @@
           </p:nvSpPr>
           <p:spPr>
             <a:xfrm>
-              <a:off x="1121403" y="6646451"/>
+              <a:off x="1460203" y="5769110"/>
               <a:ext cx="183480" cy="100091"/>
             </a:xfrm>
             <a:prstGeom prst="rect">
@@ -3671,7 +3671,7 @@
           </p:nvSpPr>
           <p:spPr>
             <a:xfrm>
-              <a:off x="2176112" y="6651804"/>
+              <a:off x="2059257" y="5774463"/>
               <a:ext cx="183480" cy="94739"/>
             </a:xfrm>
             <a:prstGeom prst="rect">
@@ -3717,7 +3717,7 @@
           </p:nvSpPr>
           <p:spPr>
             <a:xfrm>
-              <a:off x="3234529" y="6651804"/>
+              <a:off x="2662018" y="5774463"/>
               <a:ext cx="176063" cy="94739"/>
             </a:xfrm>
             <a:prstGeom prst="rect">
@@ -3763,7 +3763,7 @@
           </p:nvSpPr>
           <p:spPr>
             <a:xfrm>
-              <a:off x="4248898" y="6651804"/>
+              <a:off x="3220732" y="5774463"/>
               <a:ext cx="256743" cy="94739"/>
             </a:xfrm>
             <a:prstGeom prst="rect">
@@ -3809,7 +3809,7 @@
           </p:nvSpPr>
           <p:spPr>
             <a:xfrm>
-              <a:off x="5343882" y="6646709"/>
+              <a:off x="3860060" y="5769368"/>
               <a:ext cx="176192" cy="99833"/>
             </a:xfrm>
             <a:prstGeom prst="rect">
@@ -3855,7 +3855,7 @@
           </p:nvSpPr>
           <p:spPr>
             <a:xfrm>
-              <a:off x="6394947" y="6646451"/>
+              <a:off x="4455470" y="5769110"/>
               <a:ext cx="183480" cy="100091"/>
             </a:xfrm>
             <a:prstGeom prst="rect">
@@ -3901,7 +3901,7 @@
           </p:nvSpPr>
           <p:spPr>
             <a:xfrm>
-              <a:off x="7442336" y="6651804"/>
+              <a:off x="5047203" y="5774463"/>
               <a:ext cx="198120" cy="94739"/>
             </a:xfrm>
             <a:prstGeom prst="rect">
@@ -3947,7 +3947,7 @@
           </p:nvSpPr>
           <p:spPr>
             <a:xfrm rot="-5400000">
-              <a:off x="-1831080" y="3495701"/>
+              <a:off x="-1278986" y="3891925"/>
               <a:ext cx="3908952" cy="155345"/>
             </a:xfrm>
             <a:prstGeom prst="rect">
@@ -3993,8 +3993,8 @@
           </p:nvSpPr>
           <p:spPr>
             <a:xfrm>
-              <a:off x="8338705" y="3043155"/>
-              <a:ext cx="723053" cy="1060438"/>
+              <a:off x="5670179" y="3439379"/>
+              <a:ext cx="2712959" cy="1060438"/>
             </a:xfrm>
             <a:prstGeom prst="rect">
               <a:avLst/>
@@ -4019,8 +4019,8 @@
           </p:nvSpPr>
           <p:spPr>
             <a:xfrm>
-              <a:off x="8420946" y="3137449"/>
-              <a:ext cx="229269" cy="125034"/>
+              <a:off x="5752420" y="3503200"/>
+              <a:ext cx="2036340" cy="155506"/>
             </a:xfrm>
             <a:prstGeom prst="rect">
               <a:avLst/>
@@ -4052,7 +4052,7 @@
                   <a:latin typeface="Helvetica"/>
                   <a:cs typeface="Helvetica"/>
                 </a:rPr>
-                <a:t>FG</a:t>
+                <a:t>Functional strategy group</a:t>
               </a:r>
             </a:p>
           </p:txBody>
@@ -4065,8 +4065,8 @@
           </p:nvSpPr>
           <p:spPr>
             <a:xfrm>
-              <a:off x="8420946" y="3362984"/>
-              <a:ext cx="219455" cy="219455"/>
+              <a:off x="5752420" y="3759208"/>
+              <a:ext cx="219455" cy="219456"/>
             </a:xfrm>
             <a:prstGeom prst="rect">
               <a:avLst/>
@@ -4091,7 +4091,59 @@
           </p:nvSpPr>
           <p:spPr>
             <a:xfrm>
-              <a:off x="8431583" y="3373620"/>
+              <a:off x="5763057" y="3769844"/>
+              <a:ext cx="198183" cy="198183"/>
+            </a:xfrm>
+            <a:prstGeom prst="rect">
+              <a:avLst/>
+            </a:prstGeom>
+            <a:solidFill>
+              <a:srgbClr val="F05A5A">
+                <a:alpha val="100000"/>
+              </a:srgbClr>
+            </a:solidFill>
+          </p:spPr>
+          <p:txBody>
+            <a:bodyPr/>
+            <a:lstStyle/>
+            <a:p/>
+          </p:txBody>
+        </p:sp>
+        <p:sp>
+          <p:nvSpPr>
+            <p:cNvPr id="57" name="rc57"/>
+            <p:cNvSpPr/>
+            <p:nvPr/>
+          </p:nvSpPr>
+          <p:spPr>
+            <a:xfrm>
+              <a:off x="5752420" y="3978664"/>
+              <a:ext cx="219455" cy="219455"/>
+            </a:xfrm>
+            <a:prstGeom prst="rect">
+              <a:avLst/>
+            </a:prstGeom>
+            <a:solidFill>
+              <a:srgbClr val="FFFFFF">
+                <a:alpha val="100000"/>
+              </a:srgbClr>
+            </a:solidFill>
+          </p:spPr>
+          <p:txBody>
+            <a:bodyPr/>
+            <a:lstStyle/>
+            <a:p/>
+          </p:txBody>
+        </p:sp>
+        <p:sp>
+          <p:nvSpPr>
+            <p:cNvPr id="58" name="rc58"/>
+            <p:cNvSpPr/>
+            <p:nvPr/>
+          </p:nvSpPr>
+          <p:spPr>
+            <a:xfrm>
+              <a:off x="5763057" y="3989300"/>
               <a:ext cx="198183" cy="198183"/>
             </a:xfrm>
             <a:prstGeom prst="rect">
@@ -4111,13 +4163,13 @@
         </p:sp>
         <p:sp>
           <p:nvSpPr>
-            <p:cNvPr id="57" name="rc57"/>
-            <p:cNvSpPr/>
-            <p:nvPr/>
-          </p:nvSpPr>
-          <p:spPr>
-            <a:xfrm>
-              <a:off x="8420946" y="3582440"/>
+            <p:cNvPr id="59" name="rc59"/>
+            <p:cNvSpPr/>
+            <p:nvPr/>
+          </p:nvSpPr>
+          <p:spPr>
+            <a:xfrm>
+              <a:off x="5752420" y="4198120"/>
               <a:ext cx="219455" cy="219455"/>
             </a:xfrm>
             <a:prstGeom prst="rect">
@@ -4137,65 +4189,13 @@
         </p:sp>
         <p:sp>
           <p:nvSpPr>
-            <p:cNvPr id="58" name="rc58"/>
-            <p:cNvSpPr/>
-            <p:nvPr/>
-          </p:nvSpPr>
-          <p:spPr>
-            <a:xfrm>
-              <a:off x="8431583" y="3593076"/>
-              <a:ext cx="198183" cy="198183"/>
-            </a:xfrm>
-            <a:prstGeom prst="rect">
-              <a:avLst/>
-            </a:prstGeom>
-            <a:solidFill>
-              <a:srgbClr val="F05A5A">
-                <a:alpha val="100000"/>
-              </a:srgbClr>
-            </a:solidFill>
-          </p:spPr>
-          <p:txBody>
-            <a:bodyPr/>
-            <a:lstStyle/>
-            <a:p/>
-          </p:txBody>
-        </p:sp>
-        <p:sp>
-          <p:nvSpPr>
-            <p:cNvPr id="59" name="rc59"/>
-            <p:cNvSpPr/>
-            <p:nvPr/>
-          </p:nvSpPr>
-          <p:spPr>
-            <a:xfrm>
-              <a:off x="8420946" y="3801896"/>
-              <a:ext cx="219455" cy="219455"/>
-            </a:xfrm>
-            <a:prstGeom prst="rect">
-              <a:avLst/>
-            </a:prstGeom>
-            <a:solidFill>
-              <a:srgbClr val="FFFFFF">
-                <a:alpha val="100000"/>
-              </a:srgbClr>
-            </a:solidFill>
-          </p:spPr>
-          <p:txBody>
-            <a:bodyPr/>
-            <a:lstStyle/>
-            <a:p/>
-          </p:txBody>
-        </p:sp>
-        <p:sp>
-          <p:nvSpPr>
             <p:cNvPr id="60" name="rc60"/>
             <p:cNvSpPr/>
             <p:nvPr/>
           </p:nvSpPr>
           <p:spPr>
             <a:xfrm>
-              <a:off x="8431583" y="3812532"/>
+              <a:off x="5763057" y="4208756"/>
               <a:ext cx="198183" cy="198183"/>
             </a:xfrm>
             <a:prstGeom prst="rect">
@@ -4221,8 +4221,8 @@
           </p:nvSpPr>
           <p:spPr>
             <a:xfrm>
-              <a:off x="8722644" y="3420247"/>
-              <a:ext cx="256872" cy="99833"/>
+              <a:off x="6054118" y="3789771"/>
+              <a:ext cx="2055559" cy="126533"/>
             </a:xfrm>
             <a:prstGeom prst="rect">
               <a:avLst/>
@@ -4254,7 +4254,7 @@
                   <a:latin typeface="Helvetica"/>
                   <a:cs typeface="Helvetica"/>
                 </a:rPr>
-                <a:t>FG2</a:t>
+                <a:t>FG1: slow-history and large-bodied</a:t>
               </a:r>
             </a:p>
           </p:txBody>
@@ -4267,8 +4267,8 @@
           </p:nvSpPr>
           <p:spPr>
             <a:xfrm>
-              <a:off x="8722644" y="3639703"/>
-              <a:ext cx="256872" cy="99833"/>
+              <a:off x="6054118" y="4009227"/>
+              <a:ext cx="2246778" cy="126533"/>
             </a:xfrm>
             <a:prstGeom prst="rect">
               <a:avLst/>
@@ -4300,7 +4300,7 @@
                   <a:latin typeface="Helvetica"/>
                   <a:cs typeface="Helvetica"/>
                 </a:rPr>
-                <a:t>FG1</a:t>
+                <a:t>FG2: broad niche and higher fecundity</a:t>
               </a:r>
             </a:p>
           </p:txBody>
@@ -4313,8 +4313,8 @@
           </p:nvSpPr>
           <p:spPr>
             <a:xfrm>
-              <a:off x="8722644" y="3859159"/>
-              <a:ext cx="256872" cy="99833"/>
+              <a:off x="6054118" y="4230360"/>
+              <a:ext cx="1937925" cy="124856"/>
             </a:xfrm>
             <a:prstGeom prst="rect">
               <a:avLst/>
@@ -4346,7 +4346,7 @@
                   <a:latin typeface="Helvetica"/>
                   <a:cs typeface="Helvetica"/>
                 </a:rPr>
-                <a:t>FG3</a:t>
+                <a:t>FG3: restricted and low-dispersal</a:t>
               </a:r>
             </a:p>
           </p:txBody>
@@ -4359,7 +4359,7 @@
           </p:nvSpPr>
           <p:spPr>
             <a:xfrm>
-              <a:off x="580318" y="293324"/>
+              <a:off x="1192512" y="1963113"/>
               <a:ext cx="6855035" cy="156877"/>
             </a:xfrm>
             <a:prstGeom prst="rect">
@@ -4405,7 +4405,7 @@
           </p:nvSpPr>
           <p:spPr>
             <a:xfrm>
-              <a:off x="580318" y="40222"/>
+              <a:off x="1192512" y="1710011"/>
               <a:ext cx="4830638" cy="169986"/>
             </a:xfrm>
             <a:prstGeom prst="rect">
